--- a/가르치지않아도배운다_발표.pptx
+++ b/가르치지않아도배운다_발표.pptx
@@ -323,7 +323,7 @@
           <a:p>
             <a:fld id="{5BCAD085-E8A6-8845-BD4E-CB4CCA059FC4}" type="datetimeFigureOut">
               <a:rPr lang="en-US" smtClean="0"/>
-              <a:t>8/19/2026</a:t>
+              <a:t>8/20/2026</a:t>
             </a:fld>
             <a:endParaRPr lang="en-US"/>
           </a:p>
@@ -491,7 +491,7 @@
           <a:p>
             <a:fld id="{5BCAD085-E8A6-8845-BD4E-CB4CCA059FC4}" type="datetimeFigureOut">
               <a:rPr lang="en-US" smtClean="0"/>
-              <a:t>8/19/2026</a:t>
+              <a:t>8/20/2026</a:t>
             </a:fld>
             <a:endParaRPr lang="en-US"/>
           </a:p>
@@ -669,7 +669,7 @@
           <a:p>
             <a:fld id="{5BCAD085-E8A6-8845-BD4E-CB4CCA059FC4}" type="datetimeFigureOut">
               <a:rPr lang="en-US" smtClean="0"/>
-              <a:t>8/19/2026</a:t>
+              <a:t>8/20/2026</a:t>
             </a:fld>
             <a:endParaRPr lang="en-US"/>
           </a:p>
@@ -837,7 +837,7 @@
           <a:p>
             <a:fld id="{5BCAD085-E8A6-8845-BD4E-CB4CCA059FC4}" type="datetimeFigureOut">
               <a:rPr lang="en-US" smtClean="0"/>
-              <a:t>8/19/2026</a:t>
+              <a:t>8/20/2026</a:t>
             </a:fld>
             <a:endParaRPr lang="en-US"/>
           </a:p>
@@ -1082,7 +1082,7 @@
           <a:p>
             <a:fld id="{5BCAD085-E8A6-8845-BD4E-CB4CCA059FC4}" type="datetimeFigureOut">
               <a:rPr lang="en-US" smtClean="0"/>
-              <a:t>8/19/2026</a:t>
+              <a:t>8/20/2026</a:t>
             </a:fld>
             <a:endParaRPr lang="en-US"/>
           </a:p>
@@ -1367,7 +1367,7 @@
           <a:p>
             <a:fld id="{5BCAD085-E8A6-8845-BD4E-CB4CCA059FC4}" type="datetimeFigureOut">
               <a:rPr lang="en-US" smtClean="0"/>
-              <a:t>8/19/2026</a:t>
+              <a:t>8/20/2026</a:t>
             </a:fld>
             <a:endParaRPr lang="en-US"/>
           </a:p>
@@ -1786,7 +1786,7 @@
           <a:p>
             <a:fld id="{5BCAD085-E8A6-8845-BD4E-CB4CCA059FC4}" type="datetimeFigureOut">
               <a:rPr lang="en-US" smtClean="0"/>
-              <a:t>8/19/2026</a:t>
+              <a:t>8/20/2026</a:t>
             </a:fld>
             <a:endParaRPr lang="en-US"/>
           </a:p>
@@ -1903,7 +1903,7 @@
           <a:p>
             <a:fld id="{5BCAD085-E8A6-8845-BD4E-CB4CCA059FC4}" type="datetimeFigureOut">
               <a:rPr lang="en-US" smtClean="0"/>
-              <a:t>8/19/2026</a:t>
+              <a:t>8/20/2026</a:t>
             </a:fld>
             <a:endParaRPr lang="en-US"/>
           </a:p>
@@ -1998,7 +1998,7 @@
           <a:p>
             <a:fld id="{5BCAD085-E8A6-8845-BD4E-CB4CCA059FC4}" type="datetimeFigureOut">
               <a:rPr lang="en-US" smtClean="0"/>
-              <a:t>8/19/2026</a:t>
+              <a:t>8/20/2026</a:t>
             </a:fld>
             <a:endParaRPr lang="en-US"/>
           </a:p>
@@ -2273,7 +2273,7 @@
           <a:p>
             <a:fld id="{5BCAD085-E8A6-8845-BD4E-CB4CCA059FC4}" type="datetimeFigureOut">
               <a:rPr lang="en-US" smtClean="0"/>
-              <a:t>8/19/2026</a:t>
+              <a:t>8/20/2026</a:t>
             </a:fld>
             <a:endParaRPr lang="en-US"/>
           </a:p>
@@ -2525,7 +2525,7 @@
           <a:p>
             <a:fld id="{5BCAD085-E8A6-8845-BD4E-CB4CCA059FC4}" type="datetimeFigureOut">
               <a:rPr lang="en-US" smtClean="0"/>
-              <a:t>8/19/2026</a:t>
+              <a:t>8/20/2026</a:t>
             </a:fld>
             <a:endParaRPr lang="en-US"/>
           </a:p>
@@ -2736,7 +2736,7 @@
           <a:p>
             <a:fld id="{5BCAD085-E8A6-8845-BD4E-CB4CCA059FC4}" type="datetimeFigureOut">
               <a:rPr lang="en-US" smtClean="0"/>
-              <a:t>8/19/2026</a:t>
+              <a:t>8/20/2026</a:t>
             </a:fld>
             <a:endParaRPr lang="en-US"/>
           </a:p>
@@ -3222,14 +3222,110 @@
           <a:p>
             <a:pPr algn="ctr"/>
             <a:r>
-              <a:rPr sz="2500" b="0" i="0">
+              <a:rPr sz="2500" b="0" i="0" dirty="0" err="1">
                 <a:solidFill>
                   <a:srgbClr val="00B32D"/>
                 </a:solidFill>
                 <a:latin typeface="Consolas"/>
               </a:rPr>
-              <a:t>매크로 자동화 수업에서 발견한 AI 시대의 교육</a:t>
-            </a:r>
+              <a:t>매크로</a:t>
+            </a:r>
+            <a:r>
+              <a:rPr sz="2500" b="0" i="0" dirty="0">
+                <a:solidFill>
+                  <a:srgbClr val="00B32D"/>
+                </a:solidFill>
+                <a:latin typeface="Consolas"/>
+              </a:rPr>
+              <a:t> </a:t>
+            </a:r>
+            <a:r>
+              <a:rPr sz="2500" b="0" i="0" dirty="0" err="1">
+                <a:solidFill>
+                  <a:srgbClr val="00B32D"/>
+                </a:solidFill>
+                <a:latin typeface="Consolas"/>
+              </a:rPr>
+              <a:t>자동화</a:t>
+            </a:r>
+            <a:r>
+              <a:rPr sz="2500" b="0" i="0" dirty="0">
+                <a:solidFill>
+                  <a:srgbClr val="00B32D"/>
+                </a:solidFill>
+                <a:latin typeface="Consolas"/>
+              </a:rPr>
+              <a:t> </a:t>
+            </a:r>
+            <a:r>
+              <a:rPr sz="2500" b="0" i="0" dirty="0" err="1">
+                <a:solidFill>
+                  <a:srgbClr val="00B32D"/>
+                </a:solidFill>
+                <a:latin typeface="Consolas"/>
+              </a:rPr>
+              <a:t>수업에서</a:t>
+            </a:r>
+            <a:r>
+              <a:rPr sz="2500" b="0" i="0" dirty="0">
+                <a:solidFill>
+                  <a:srgbClr val="00B32D"/>
+                </a:solidFill>
+                <a:latin typeface="Consolas"/>
+              </a:rPr>
+              <a:t> </a:t>
+            </a:r>
+            <a:r>
+              <a:rPr sz="2500" b="0" i="0" dirty="0" err="1">
+                <a:solidFill>
+                  <a:srgbClr val="00B32D"/>
+                </a:solidFill>
+                <a:latin typeface="Consolas"/>
+              </a:rPr>
+              <a:t>발견한</a:t>
+            </a:r>
+            <a:r>
+              <a:rPr sz="2500" b="0" i="0" dirty="0">
+                <a:solidFill>
+                  <a:srgbClr val="00B32D"/>
+                </a:solidFill>
+                <a:latin typeface="Consolas"/>
+              </a:rPr>
+              <a:t> AI </a:t>
+            </a:r>
+            <a:r>
+              <a:rPr sz="2500" b="0" i="0" dirty="0" err="1">
+                <a:solidFill>
+                  <a:srgbClr val="00B32D"/>
+                </a:solidFill>
+                <a:latin typeface="Consolas"/>
+              </a:rPr>
+              <a:t>시대의</a:t>
+            </a:r>
+            <a:r>
+              <a:rPr sz="2500" b="0" i="0" dirty="0">
+                <a:solidFill>
+                  <a:srgbClr val="00B32D"/>
+                </a:solidFill>
+                <a:latin typeface="Consolas"/>
+              </a:rPr>
+              <a:t> </a:t>
+            </a:r>
+            <a:r>
+              <a:rPr sz="2500" b="0" i="0" dirty="0" err="1">
+                <a:solidFill>
+                  <a:srgbClr val="00B32D"/>
+                </a:solidFill>
+                <a:latin typeface="Consolas"/>
+              </a:rPr>
+              <a:t>교육</a:t>
+            </a:r>
+            <a:endParaRPr sz="2500" b="0" i="0" dirty="0">
+              <a:solidFill>
+                <a:srgbClr val="00B32D"/>
+              </a:solidFill>
+              <a:latin typeface="Consolas"/>
+            </a:endParaRPr>
           </a:p>
         </p:txBody>
       </p:sp>
@@ -14275,7 +14371,7 @@
         </p:nvSpPr>
         <p:spPr>
           <a:xfrm>
-            <a:off x="457200" y="3127248"/>
+            <a:off x="457200" y="5587631"/>
             <a:ext cx="11247120" cy="530352"/>
           </a:xfrm>
           <a:prstGeom prst="rect">
@@ -14310,7 +14406,7 @@
         </p:nvSpPr>
         <p:spPr>
           <a:xfrm>
-            <a:off x="7772400" y="5029200"/>
+            <a:off x="777240" y="3657600"/>
             <a:ext cx="4114800" cy="1463040"/>
           </a:xfrm>
           <a:prstGeom prst="rect">
@@ -14354,7 +14450,7 @@
         </p:nvSpPr>
         <p:spPr>
           <a:xfrm>
-            <a:off x="7772400" y="5029200"/>
+            <a:off x="777240" y="3657600"/>
             <a:ext cx="54864" cy="1463040"/>
           </a:xfrm>
           <a:prstGeom prst="rect">
@@ -14398,7 +14494,7 @@
         </p:nvSpPr>
         <p:spPr>
           <a:xfrm>
-            <a:off x="7955279" y="5120640"/>
+            <a:off x="960119" y="3749040"/>
             <a:ext cx="3749039" cy="1188720"/>
           </a:xfrm>
           <a:prstGeom prst="rect">
@@ -14414,14 +14510,95 @@
           <a:p>
             <a:pPr algn="l"/>
             <a:r>
-              <a:rPr sz="1800" b="0" i="1">
+              <a:rPr sz="1800" b="0" i="1" dirty="0" err="1">
                 <a:solidFill>
                   <a:srgbClr val="00B32D"/>
                 </a:solidFill>
                 <a:latin typeface="Consolas"/>
               </a:rPr>
-              <a:t>처음엔 단순한 자동화 실습이었다.
-그런데...</a:t>
+              <a:t>처음엔</a:t>
+            </a:r>
+            <a:r>
+              <a:rPr sz="1800" b="0" i="1" dirty="0">
+                <a:solidFill>
+                  <a:srgbClr val="00B32D"/>
+                </a:solidFill>
+                <a:latin typeface="Consolas"/>
+              </a:rPr>
+              <a:t> </a:t>
+            </a:r>
+            <a:r>
+              <a:rPr sz="1800" b="0" i="1" dirty="0" err="1">
+                <a:solidFill>
+                  <a:srgbClr val="00B32D"/>
+                </a:solidFill>
+                <a:latin typeface="Consolas"/>
+              </a:rPr>
+              <a:t>단순한</a:t>
+            </a:r>
+            <a:r>
+              <a:rPr sz="1800" b="0" i="1" dirty="0">
+                <a:solidFill>
+                  <a:srgbClr val="00B32D"/>
+                </a:solidFill>
+                <a:latin typeface="Consolas"/>
+              </a:rPr>
+              <a:t> </a:t>
+            </a:r>
+            <a:r>
+              <a:rPr sz="1800" b="0" i="1" dirty="0" err="1">
+                <a:solidFill>
+                  <a:srgbClr val="00B32D"/>
+                </a:solidFill>
+                <a:latin typeface="Consolas"/>
+              </a:rPr>
+              <a:t>자동화</a:t>
+            </a:r>
+            <a:r>
+              <a:rPr sz="1800" b="0" i="1" dirty="0">
+                <a:solidFill>
+                  <a:srgbClr val="00B32D"/>
+                </a:solidFill>
+                <a:latin typeface="Consolas"/>
+              </a:rPr>
+              <a:t> </a:t>
+            </a:r>
+            <a:r>
+              <a:rPr sz="1800" b="0" i="1" dirty="0" err="1">
+                <a:solidFill>
+                  <a:srgbClr val="00B32D"/>
+                </a:solidFill>
+                <a:latin typeface="Consolas"/>
+              </a:rPr>
+              <a:t>실습이었다</a:t>
+            </a:r>
+            <a:r>
+              <a:rPr sz="1800" b="0" i="1" dirty="0">
+                <a:solidFill>
+                  <a:srgbClr val="00B32D"/>
+                </a:solidFill>
+                <a:latin typeface="Consolas"/>
+              </a:rPr>
+              <a:t>.
+</a:t>
+            </a:r>
+            <a:r>
+              <a:rPr sz="1800" b="0" i="1" dirty="0" err="1">
+                <a:solidFill>
+                  <a:srgbClr val="00B32D"/>
+                </a:solidFill>
+                <a:latin typeface="Consolas"/>
+              </a:rPr>
+              <a:t>그런데</a:t>
+            </a:r>
+            <a:r>
+              <a:rPr sz="1800" b="0" i="1" dirty="0">
+                <a:solidFill>
+                  <a:srgbClr val="00B32D"/>
+                </a:solidFill>
+                <a:latin typeface="Consolas"/>
+              </a:rPr>
+              <a:t>...</a:t>
             </a:r>
           </a:p>
         </p:txBody>
